--- a/internal_doc/02.架构框架/sequoiadb概念介绍.pptx
+++ b/internal_doc/02.架构框架/sequoiadb概念介绍.pptx
@@ -292,7 +292,7 @@
             <a:fld id="{072D00DD-FCE2-4865-A4C8-4DF25FC322DB}" type="datetimeFigureOut">
               <a:rPr lang="zh-CN" altLang="en-US" smtClean="0"/>
               <a:pPr/>
-              <a:t>2014/2/17</a:t>
+              <a:t>2014/3/10</a:t>
             </a:fld>
             <a:endParaRPr lang="zh-CN" altLang="en-US"/>
           </a:p>
@@ -459,7 +459,7 @@
             <a:fld id="{072D00DD-FCE2-4865-A4C8-4DF25FC322DB}" type="datetimeFigureOut">
               <a:rPr lang="zh-CN" altLang="en-US" smtClean="0"/>
               <a:pPr/>
-              <a:t>2014/2/17</a:t>
+              <a:t>2014/3/10</a:t>
             </a:fld>
             <a:endParaRPr lang="zh-CN" altLang="en-US"/>
           </a:p>
@@ -636,7 +636,7 @@
             <a:fld id="{072D00DD-FCE2-4865-A4C8-4DF25FC322DB}" type="datetimeFigureOut">
               <a:rPr lang="zh-CN" altLang="en-US" smtClean="0"/>
               <a:pPr/>
-              <a:t>2014/2/17</a:t>
+              <a:t>2014/3/10</a:t>
             </a:fld>
             <a:endParaRPr lang="zh-CN" altLang="en-US"/>
           </a:p>
@@ -803,7 +803,7 @@
             <a:fld id="{072D00DD-FCE2-4865-A4C8-4DF25FC322DB}" type="datetimeFigureOut">
               <a:rPr lang="zh-CN" altLang="en-US" smtClean="0"/>
               <a:pPr/>
-              <a:t>2014/2/17</a:t>
+              <a:t>2014/3/10</a:t>
             </a:fld>
             <a:endParaRPr lang="zh-CN" altLang="en-US"/>
           </a:p>
@@ -1046,7 +1046,7 @@
             <a:fld id="{072D00DD-FCE2-4865-A4C8-4DF25FC322DB}" type="datetimeFigureOut">
               <a:rPr lang="zh-CN" altLang="en-US" smtClean="0"/>
               <a:pPr/>
-              <a:t>2014/2/17</a:t>
+              <a:t>2014/3/10</a:t>
             </a:fld>
             <a:endParaRPr lang="zh-CN" altLang="en-US"/>
           </a:p>
@@ -1331,7 +1331,7 @@
             <a:fld id="{072D00DD-FCE2-4865-A4C8-4DF25FC322DB}" type="datetimeFigureOut">
               <a:rPr lang="zh-CN" altLang="en-US" smtClean="0"/>
               <a:pPr/>
-              <a:t>2014/2/17</a:t>
+              <a:t>2014/3/10</a:t>
             </a:fld>
             <a:endParaRPr lang="zh-CN" altLang="en-US"/>
           </a:p>
@@ -1750,7 +1750,7 @@
             <a:fld id="{072D00DD-FCE2-4865-A4C8-4DF25FC322DB}" type="datetimeFigureOut">
               <a:rPr lang="zh-CN" altLang="en-US" smtClean="0"/>
               <a:pPr/>
-              <a:t>2014/2/17</a:t>
+              <a:t>2014/3/10</a:t>
             </a:fld>
             <a:endParaRPr lang="zh-CN" altLang="en-US"/>
           </a:p>
@@ -1865,7 +1865,7 @@
             <a:fld id="{072D00DD-FCE2-4865-A4C8-4DF25FC322DB}" type="datetimeFigureOut">
               <a:rPr lang="zh-CN" altLang="en-US" smtClean="0"/>
               <a:pPr/>
-              <a:t>2014/2/17</a:t>
+              <a:t>2014/3/10</a:t>
             </a:fld>
             <a:endParaRPr lang="zh-CN" altLang="en-US"/>
           </a:p>
@@ -1957,7 +1957,7 @@
             <a:fld id="{072D00DD-FCE2-4865-A4C8-4DF25FC322DB}" type="datetimeFigureOut">
               <a:rPr lang="zh-CN" altLang="en-US" smtClean="0"/>
               <a:pPr/>
-              <a:t>2014/2/17</a:t>
+              <a:t>2014/3/10</a:t>
             </a:fld>
             <a:endParaRPr lang="zh-CN" altLang="en-US"/>
           </a:p>
@@ -2231,7 +2231,7 @@
             <a:fld id="{072D00DD-FCE2-4865-A4C8-4DF25FC322DB}" type="datetimeFigureOut">
               <a:rPr lang="zh-CN" altLang="en-US" smtClean="0"/>
               <a:pPr/>
-              <a:t>2014/2/17</a:t>
+              <a:t>2014/3/10</a:t>
             </a:fld>
             <a:endParaRPr lang="zh-CN" altLang="en-US"/>
           </a:p>
@@ -2481,7 +2481,7 @@
             <a:fld id="{072D00DD-FCE2-4865-A4C8-4DF25FC322DB}" type="datetimeFigureOut">
               <a:rPr lang="zh-CN" altLang="en-US" smtClean="0"/>
               <a:pPr/>
-              <a:t>2014/2/17</a:t>
+              <a:t>2014/3/10</a:t>
             </a:fld>
             <a:endParaRPr lang="zh-CN" altLang="en-US"/>
           </a:p>
@@ -2691,7 +2691,7 @@
             <a:fld id="{072D00DD-FCE2-4865-A4C8-4DF25FC322DB}" type="datetimeFigureOut">
               <a:rPr lang="zh-CN" altLang="en-US" smtClean="0"/>
               <a:pPr/>
-              <a:t>2014/2/17</a:t>
+              <a:t>2014/3/10</a:t>
             </a:fld>
             <a:endParaRPr lang="zh-CN" altLang="en-US"/>
           </a:p>
@@ -5228,11 +5228,7 @@
             </a:r>
             <a:r>
               <a:rPr lang="zh-CN" altLang="en-US" dirty="0" smtClean="0"/>
-              <a:t>概</a:t>
-            </a:r>
-            <a:r>
-              <a:rPr lang="zh-CN" altLang="en-US" dirty="0" smtClean="0"/>
-              <a:t>念</a:t>
+              <a:t>概念</a:t>
             </a:r>
             <a:r>
               <a:rPr lang="en-US" altLang="zh-CN" dirty="0" smtClean="0"/>
@@ -6032,8 +6028,8 @@
           </p:nvSpPr>
           <p:spPr>
             <a:xfrm>
-              <a:off x="4500562" y="5000636"/>
-              <a:ext cx="721736" cy="369332"/>
+              <a:off x="4618609" y="5000636"/>
+              <a:ext cx="453457" cy="369332"/>
             </a:xfrm>
             <a:prstGeom prst="rect">
               <a:avLst/>
@@ -6048,7 +6044,7 @@
             <a:p>
               <a:r>
                 <a:rPr lang="en-US" altLang="zh-CN" dirty="0" smtClean="0"/>
-                <a:t>Shard</a:t>
+                <a:t>RG</a:t>
               </a:r>
               <a:endParaRPr lang="zh-CN" altLang="en-US" dirty="0"/>
             </a:p>
@@ -6166,8 +6162,8 @@
           </p:nvSpPr>
           <p:spPr>
             <a:xfrm>
-              <a:off x="4500562" y="5000636"/>
-              <a:ext cx="721736" cy="369332"/>
+              <a:off x="4618609" y="5000636"/>
+              <a:ext cx="453457" cy="369332"/>
             </a:xfrm>
             <a:prstGeom prst="rect">
               <a:avLst/>
@@ -6182,7 +6178,7 @@
             <a:p>
               <a:r>
                 <a:rPr lang="en-US" altLang="zh-CN" dirty="0" smtClean="0"/>
-                <a:t>Shard</a:t>
+                <a:t>RG</a:t>
               </a:r>
               <a:endParaRPr lang="zh-CN" altLang="en-US" dirty="0"/>
             </a:p>
@@ -6300,8 +6296,8 @@
           </p:nvSpPr>
           <p:spPr>
             <a:xfrm>
-              <a:off x="4500562" y="5000636"/>
-              <a:ext cx="721736" cy="369332"/>
+              <a:off x="4618609" y="5000636"/>
+              <a:ext cx="453457" cy="369332"/>
             </a:xfrm>
             <a:prstGeom prst="rect">
               <a:avLst/>
@@ -6316,7 +6312,7 @@
             <a:p>
               <a:r>
                 <a:rPr lang="en-US" altLang="zh-CN" dirty="0" smtClean="0"/>
-                <a:t>Shard</a:t>
+                <a:t>RG</a:t>
               </a:r>
               <a:endParaRPr lang="zh-CN" altLang="en-US" dirty="0"/>
             </a:p>
@@ -6750,11 +6746,7 @@
             </a:r>
             <a:r>
               <a:rPr lang="zh-CN" altLang="en-US" dirty="0" smtClean="0"/>
-              <a:t>业</a:t>
-            </a:r>
-            <a:r>
-              <a:rPr lang="zh-CN" altLang="en-US" dirty="0" smtClean="0"/>
-              <a:t>务（二）</a:t>
+              <a:t>业务（二）</a:t>
             </a:r>
             <a:endParaRPr lang="zh-CN" altLang="en-US" dirty="0"/>
           </a:p>
